--- a/REVIEW1.pptx
+++ b/REVIEW1.pptx
@@ -135,7 +135,7 @@
           <a:p>
             <a:fld id="{970D3E96-DF03-4D20-A091-969AEE254DB2}" type="datetimeFigureOut">
               <a:rPr lang="en-IN" smtClean="0"/>
-              <a:t>29-01-2026</a:t>
+              <a:t>12-02-2026</a:t>
             </a:fld>
             <a:endParaRPr lang="en-IN"/>
           </a:p>
